--- a/docs/en/briefing-deck.pptx
+++ b/docs/en/briefing-deck.pptx
@@ -8058,7 +8058,7 @@
                           <a:ea typeface="Calibri"/>
                           <a:cs typeface="Calibri"/>
                         </a:rPr>
-                        <a:t>Not quoted</a:t>
+                        <a:t>Flash ¥38 / 1k pp (¥19 at 50%)</a:t>
                       </a:r>
                     </a:p>
                   </a:txBody>
@@ -8160,7 +8160,7 @@
                 <a:ea typeface="Calibri"/>
                 <a:cs typeface="Calibri"/>
               </a:rPr>
-              <a:t>About 9.6k tokens per page. If billed per token, the input price must be below </a:t>
+              <a:t>Tested tier per the vendor: Flash 2.1, about $5.3 / 1,000 pages at the 09-28 list price, </a:t>
             </a:r>
             <a:r>
               <a:rPr sz="950" b="1">
@@ -8171,7 +8171,7 @@
                 <a:ea typeface="Calibri"/>
                 <a:cs typeface="Calibri"/>
               </a:rPr>
-              <a:t>≈ $1.13 / million tokens</a:t>
+              <a:t>roughly half of Azure's list</a:t>
             </a:r>
             <a:r>
               <a:rPr sz="950" b="0">
@@ -8182,7 +8182,7 @@
                 <a:ea typeface="Calibri"/>
                 <a:cs typeface="Calibri"/>
               </a:rPr>
-              <a:t> to match Azure's list price.</a:t>
+              <a:t>; unit and discount unconfirmed, service fees extra.</a:t>
             </a:r>
           </a:p>
         </p:txBody>
@@ -9660,7 +9660,7 @@
                           <a:ea typeface="Calibri"/>
                           <a:cs typeface="Calibri"/>
                         </a:rPr>
-                        <a:t>Only the alias inf-mllm; model and version unknown</a:t>
+                        <a:t>Only the alias inf-mllm; vendor says Flash 2.1, not verifiable</a:t>
                       </a:r>
                     </a:p>
                   </a:txBody>
@@ -10481,7 +10481,7 @@
         </p:nvGraphicFramePr>
         <p:xfrm>
           <a:off x="502920" y="1188720"/>
-          <a:ext cx="11185855" cy="3154679"/>
+          <a:ext cx="11185855" cy="3154680"/>
         </p:xfrm>
         <a:graphic>
           <a:graphicData uri="http://schemas.openxmlformats.org/drawingml/2006/table">
